--- a/Sem 4/RDBMS/Mod 1/RDBMS_Module_1.1.pptx
+++ b/Sem 4/RDBMS/Mod 1/RDBMS_Module_1.1.pptx
@@ -711,7 +711,7 @@
           <a:p>
             <a:fld id="{35DD917B-F07D-4D57-852E-EF9922B2A2EC}" type="datetimeFigureOut">
               <a:rPr lang="en-US" smtClean="0"/>
-              <a:t>3/4/2025</a:t>
+              <a:t>5/5/2025</a:t>
             </a:fld>
             <a:endParaRPr lang="en-US"/>
           </a:p>
@@ -12270,7 +12270,7 @@
           <a:p>
             <a:fld id="{5F468057-BAD5-4A73-9410-DEF1844B8A10}" type="datetimeFigureOut">
               <a:rPr lang="en-US" smtClean="0"/>
-              <a:t>3/4/2025</a:t>
+              <a:t>5/5/2025</a:t>
             </a:fld>
             <a:endParaRPr lang="en-US"/>
           </a:p>
@@ -12468,7 +12468,7 @@
           <a:p>
             <a:fld id="{5F468057-BAD5-4A73-9410-DEF1844B8A10}" type="datetimeFigureOut">
               <a:rPr lang="en-US" smtClean="0"/>
-              <a:t>3/4/2025</a:t>
+              <a:t>5/5/2025</a:t>
             </a:fld>
             <a:endParaRPr lang="en-US"/>
           </a:p>
@@ -12676,7 +12676,7 @@
           <a:p>
             <a:fld id="{5F468057-BAD5-4A73-9410-DEF1844B8A10}" type="datetimeFigureOut">
               <a:rPr lang="en-US" smtClean="0"/>
-              <a:t>3/4/2025</a:t>
+              <a:t>5/5/2025</a:t>
             </a:fld>
             <a:endParaRPr lang="en-US"/>
           </a:p>
@@ -12874,7 +12874,7 @@
           <a:p>
             <a:fld id="{5F468057-BAD5-4A73-9410-DEF1844B8A10}" type="datetimeFigureOut">
               <a:rPr lang="en-US" smtClean="0"/>
-              <a:t>3/4/2025</a:t>
+              <a:t>5/5/2025</a:t>
             </a:fld>
             <a:endParaRPr lang="en-US"/>
           </a:p>
@@ -13149,7 +13149,7 @@
           <a:p>
             <a:fld id="{5F468057-BAD5-4A73-9410-DEF1844B8A10}" type="datetimeFigureOut">
               <a:rPr lang="en-US" smtClean="0"/>
-              <a:t>3/4/2025</a:t>
+              <a:t>5/5/2025</a:t>
             </a:fld>
             <a:endParaRPr lang="en-US"/>
           </a:p>
@@ -13414,7 +13414,7 @@
           <a:p>
             <a:fld id="{5F468057-BAD5-4A73-9410-DEF1844B8A10}" type="datetimeFigureOut">
               <a:rPr lang="en-US" smtClean="0"/>
-              <a:t>3/4/2025</a:t>
+              <a:t>5/5/2025</a:t>
             </a:fld>
             <a:endParaRPr lang="en-US"/>
           </a:p>
@@ -13826,7 +13826,7 @@
           <a:p>
             <a:fld id="{5F468057-BAD5-4A73-9410-DEF1844B8A10}" type="datetimeFigureOut">
               <a:rPr lang="en-US" smtClean="0"/>
-              <a:t>3/4/2025</a:t>
+              <a:t>5/5/2025</a:t>
             </a:fld>
             <a:endParaRPr lang="en-US"/>
           </a:p>
@@ -13967,7 +13967,7 @@
           <a:p>
             <a:fld id="{5F468057-BAD5-4A73-9410-DEF1844B8A10}" type="datetimeFigureOut">
               <a:rPr lang="en-US" smtClean="0"/>
-              <a:t>3/4/2025</a:t>
+              <a:t>5/5/2025</a:t>
             </a:fld>
             <a:endParaRPr lang="en-US"/>
           </a:p>
@@ -14080,7 +14080,7 @@
           <a:p>
             <a:fld id="{5F468057-BAD5-4A73-9410-DEF1844B8A10}" type="datetimeFigureOut">
               <a:rPr lang="en-US" smtClean="0"/>
-              <a:t>3/4/2025</a:t>
+              <a:t>5/5/2025</a:t>
             </a:fld>
             <a:endParaRPr lang="en-US"/>
           </a:p>
@@ -14391,7 +14391,7 @@
           <a:p>
             <a:fld id="{5F468057-BAD5-4A73-9410-DEF1844B8A10}" type="datetimeFigureOut">
               <a:rPr lang="en-US" smtClean="0"/>
-              <a:t>3/4/2025</a:t>
+              <a:t>5/5/2025</a:t>
             </a:fld>
             <a:endParaRPr lang="en-US"/>
           </a:p>
@@ -14679,7 +14679,7 @@
           <a:p>
             <a:fld id="{5F468057-BAD5-4A73-9410-DEF1844B8A10}" type="datetimeFigureOut">
               <a:rPr lang="en-US" smtClean="0"/>
-              <a:t>3/4/2025</a:t>
+              <a:t>5/5/2025</a:t>
             </a:fld>
             <a:endParaRPr lang="en-US"/>
           </a:p>
@@ -14920,7 +14920,7 @@
           <a:p>
             <a:fld id="{5F468057-BAD5-4A73-9410-DEF1844B8A10}" type="datetimeFigureOut">
               <a:rPr lang="en-US" smtClean="0"/>
-              <a:t>3/4/2025</a:t>
+              <a:t>5/5/2025</a:t>
             </a:fld>
             <a:endParaRPr lang="en-US"/>
           </a:p>
@@ -17605,10 +17605,18 @@
               <a:buChar char="•"/>
             </a:pPr>
             <a:r>
-              <a:rPr lang="en-US" dirty="0"/>
+              <a:rPr lang="en-US" dirty="0">
+                <a:highlight>
+                  <a:srgbClr val="FFFF00"/>
+                </a:highlight>
+              </a:rPr>
               <a:t>Restricting unauthorized access to data. Only the DBA staff uses privileged commands and facilities.</a:t>
             </a:r>
-            <a:endParaRPr dirty="0"/>
+            <a:endParaRPr dirty="0">
+              <a:highlight>
+                <a:srgbClr val="FFFF00"/>
+              </a:highlight>
+            </a:endParaRPr>
           </a:p>
           <a:p>
             <a:pPr marL="228600" lvl="0" indent="-228600" algn="l" rtl="0">
@@ -17697,10 +17705,18 @@
               <a:buChar char="•"/>
             </a:pPr>
             <a:r>
-              <a:rPr lang="en-US" dirty="0"/>
+              <a:rPr lang="en-US" dirty="0">
+                <a:highlight>
+                  <a:srgbClr val="FFFF00"/>
+                </a:highlight>
+              </a:rPr>
               <a:t>Providing optimization of queries for efficient processing</a:t>
             </a:r>
-            <a:endParaRPr dirty="0"/>
+            <a:endParaRPr dirty="0">
+              <a:highlight>
+                <a:srgbClr val="FFFF00"/>
+              </a:highlight>
+            </a:endParaRPr>
           </a:p>
           <a:p>
             <a:pPr marL="228600" lvl="0" indent="-228600" algn="l" rtl="0">
@@ -17720,10 +17736,18 @@
               <a:buChar char="•"/>
             </a:pPr>
             <a:r>
-              <a:rPr lang="en-US" dirty="0"/>
+              <a:rPr lang="en-US" dirty="0">
+                <a:highlight>
+                  <a:srgbClr val="FFFF00"/>
+                </a:highlight>
+              </a:rPr>
               <a:t>Providing backup and recovery services</a:t>
             </a:r>
-            <a:endParaRPr dirty="0"/>
+            <a:endParaRPr dirty="0">
+              <a:highlight>
+                <a:srgbClr val="FFFF00"/>
+              </a:highlight>
+            </a:endParaRPr>
           </a:p>
           <a:p>
             <a:pPr marL="228600" lvl="0" indent="-228600" algn="l" rtl="0">
@@ -18543,10 +18567,10 @@
               <a:buChar char="•"/>
             </a:pPr>
             <a:r>
-              <a:rPr lang="en-US"/>
+              <a:rPr lang="en-US" dirty="0"/>
               <a:t>Potential for enforcing standards:</a:t>
             </a:r>
-            <a:endParaRPr/>
+            <a:endParaRPr dirty="0"/>
           </a:p>
           <a:p>
             <a:pPr marL="685800" lvl="1" indent="-228600" algn="l" rtl="0">
@@ -18566,14 +18590,14 @@
               <a:buChar char="•"/>
             </a:pPr>
             <a:r>
-              <a:rPr lang="en-US" b="1"/>
+              <a:rPr lang="en-US" b="1" dirty="0"/>
               <a:t>Standards</a:t>
             </a:r>
             <a:r>
-              <a:rPr lang="en-US"/>
+              <a:rPr lang="en-US" dirty="0"/>
               <a:t> refer to data item names, display formats, screens, report structures, meta-data (description of data), Web page layouts, etc.</a:t>
             </a:r>
-            <a:endParaRPr/>
+            <a:endParaRPr dirty="0"/>
           </a:p>
           <a:p>
             <a:pPr marL="228600" lvl="0" indent="-228600" algn="l" rtl="0">
@@ -18593,10 +18617,18 @@
               <a:buChar char="•"/>
             </a:pPr>
             <a:r>
-              <a:rPr lang="en-US"/>
-              <a:t>Reduced application development time:</a:t>
-            </a:r>
-            <a:endParaRPr/>
+              <a:rPr lang="en-US" dirty="0">
+                <a:highlight>
+                  <a:srgbClr val="FFFF00"/>
+                </a:highlight>
+              </a:rPr>
+              <a:t>Reduced application development time</a:t>
+            </a:r>
+            <a:r>
+              <a:rPr lang="en-US" dirty="0"/>
+              <a:t>:</a:t>
+            </a:r>
+            <a:endParaRPr dirty="0"/>
           </a:p>
           <a:p>
             <a:pPr marL="685800" lvl="1" indent="-228600" algn="l" rtl="0">
@@ -18616,10 +18648,10 @@
               <a:buChar char="•"/>
             </a:pPr>
             <a:r>
-              <a:rPr lang="en-US"/>
+              <a:rPr lang="en-US" dirty="0"/>
               <a:t>Incremental time to add each new application is reduced.</a:t>
             </a:r>
-            <a:endParaRPr/>
+            <a:endParaRPr dirty="0"/>
           </a:p>
           <a:p>
             <a:pPr marL="228600" lvl="0" indent="-228600" algn="l" rtl="0">
@@ -18639,10 +18671,18 @@
               <a:buChar char="•"/>
             </a:pPr>
             <a:r>
-              <a:rPr lang="en-US"/>
+              <a:rPr lang="en-US" dirty="0">
+                <a:highlight>
+                  <a:srgbClr val="FFFF00"/>
+                </a:highlight>
+              </a:rPr>
               <a:t>Flexibility to change data structures:</a:t>
             </a:r>
-            <a:endParaRPr/>
+            <a:endParaRPr dirty="0">
+              <a:highlight>
+                <a:srgbClr val="FFFF00"/>
+              </a:highlight>
+            </a:endParaRPr>
           </a:p>
           <a:p>
             <a:pPr marL="685800" lvl="1" indent="-228600" algn="l" rtl="0">
@@ -18662,10 +18702,10 @@
               <a:buChar char="•"/>
             </a:pPr>
             <a:r>
-              <a:rPr lang="en-US"/>
+              <a:rPr lang="en-US" dirty="0"/>
               <a:t>Database structure may evolve as new requirements are defined. </a:t>
             </a:r>
-            <a:endParaRPr/>
+            <a:endParaRPr dirty="0"/>
           </a:p>
           <a:p>
             <a:pPr marL="228600" lvl="0" indent="-228600" algn="l" rtl="0">
@@ -18685,10 +18725,18 @@
               <a:buChar char="•"/>
             </a:pPr>
             <a:r>
-              <a:rPr lang="en-US"/>
+              <a:rPr lang="en-US" dirty="0">
+                <a:highlight>
+                  <a:srgbClr val="FFFF00"/>
+                </a:highlight>
+              </a:rPr>
               <a:t>Availability of current information:</a:t>
             </a:r>
-            <a:endParaRPr/>
+            <a:endParaRPr dirty="0">
+              <a:highlight>
+                <a:srgbClr val="FFFF00"/>
+              </a:highlight>
+            </a:endParaRPr>
           </a:p>
           <a:p>
             <a:pPr marL="685800" lvl="1" indent="-228600" algn="l" rtl="0">
@@ -18708,10 +18756,10 @@
               <a:buChar char="•"/>
             </a:pPr>
             <a:r>
-              <a:rPr lang="en-US"/>
+              <a:rPr lang="en-US" dirty="0"/>
               <a:t>Extremely important for on-line transaction systems such as shopping, airline, hotel, car reservations.</a:t>
             </a:r>
-            <a:endParaRPr/>
+            <a:endParaRPr dirty="0"/>
           </a:p>
           <a:p>
             <a:pPr marL="228600" lvl="0" indent="-228600" algn="l" rtl="0">
@@ -18731,10 +18779,18 @@
               <a:buChar char="•"/>
             </a:pPr>
             <a:r>
-              <a:rPr lang="en-US"/>
+              <a:rPr lang="en-US" dirty="0">
+                <a:highlight>
+                  <a:srgbClr val="FFFF00"/>
+                </a:highlight>
+              </a:rPr>
               <a:t>Economies of scale:</a:t>
             </a:r>
-            <a:endParaRPr/>
+            <a:endParaRPr dirty="0">
+              <a:highlight>
+                <a:srgbClr val="FFFF00"/>
+              </a:highlight>
+            </a:endParaRPr>
           </a:p>
           <a:p>
             <a:pPr marL="685800" lvl="1" indent="-228600" algn="l" rtl="0">
@@ -18754,10 +18810,10 @@
               <a:buChar char="•"/>
             </a:pPr>
             <a:r>
-              <a:rPr lang="en-US"/>
+              <a:rPr lang="en-US" dirty="0"/>
               <a:t>Wasteful overlap of resources and personnel can be avoided by consolidating data and applications across departments.</a:t>
             </a:r>
-            <a:endParaRPr/>
+            <a:endParaRPr dirty="0"/>
           </a:p>
           <a:p>
             <a:pPr marL="685800" lvl="1" indent="-76200" algn="l" rtl="0">
@@ -18776,7 +18832,7 @@
               <a:buSzPts val="2400"/>
               <a:buNone/>
             </a:pPr>
-            <a:endParaRPr/>
+            <a:endParaRPr dirty="0"/>
           </a:p>
           <a:p>
             <a:pPr marL="457200" lvl="1" indent="0" algn="l" rtl="0">
@@ -18795,7 +18851,7 @@
               <a:buSzPts val="2400"/>
               <a:buNone/>
             </a:pPr>
-            <a:endParaRPr/>
+            <a:endParaRPr dirty="0"/>
           </a:p>
         </p:txBody>
       </p:sp>
@@ -38794,22 +38850,46 @@
             </a:r>
             <a:r>
               <a:rPr lang="en-US" dirty="0"/>
-              <a:t>: An RDBMS is a type of DBMS that stores data in a structured format using </a:t>
-            </a:r>
-            <a:r>
-              <a:rPr lang="en-US" b="1" dirty="0"/>
+              <a:t>: </a:t>
+            </a:r>
+            <a:r>
+              <a:rPr lang="en-US" dirty="0">
+                <a:highlight>
+                  <a:srgbClr val="FFFF00"/>
+                </a:highlight>
+              </a:rPr>
+              <a:t>An RDBMS is a type of DBMS that stores data in a structured format using </a:t>
+            </a:r>
+            <a:r>
+              <a:rPr lang="en-US" b="1" dirty="0">
+                <a:highlight>
+                  <a:srgbClr val="FFFF00"/>
+                </a:highlight>
+              </a:rPr>
               <a:t>tables</a:t>
             </a:r>
             <a:r>
-              <a:rPr lang="en-US" dirty="0"/>
+              <a:rPr lang="en-US" dirty="0">
+                <a:highlight>
+                  <a:srgbClr val="FFFF00"/>
+                </a:highlight>
+              </a:rPr>
               <a:t> and enforces </a:t>
             </a:r>
             <a:r>
-              <a:rPr lang="en-US" b="1" dirty="0"/>
+              <a:rPr lang="en-US" b="1" dirty="0">
+                <a:highlight>
+                  <a:srgbClr val="FFFF00"/>
+                </a:highlight>
+              </a:rPr>
               <a:t>relationships</a:t>
             </a:r>
             <a:r>
-              <a:rPr lang="en-US" dirty="0"/>
+              <a:rPr lang="en-US" dirty="0">
+                <a:highlight>
+                  <a:srgbClr val="FFFF00"/>
+                </a:highlight>
+              </a:rPr>
               <a:t> between these tables through keys (e.g., primary keys and foreign keys).</a:t>
             </a:r>
           </a:p>
